--- a/src/moodle/local_hubredirect/pix/live-session-agenda-template-ar.pptx
+++ b/src/moodle/local_hubredirect/pix/live-session-agenda-template-ar.pptx
@@ -2199,6 +2199,54 @@
           </a:p>
         </p:txBody>
       </p:sp>
+      <p:pic>
+        <p:nvPicPr>
+          <p:cNvPr id="901" name="Ehel Academy crest" descr="Ehel Academy"/>
+          <p:cNvPicPr>
+            <a:picLocks xmlns:a="http://schemas.openxmlformats.org/drawingml/2006/main" noChangeAspect="1"/>
+          </p:cNvPicPr>
+          <p:nvPr/>
+        </p:nvPicPr>
+        <p:blipFill>
+          <a:blip xmlns:a="http://schemas.openxmlformats.org/drawingml/2006/main" xmlns:r="http://schemas.openxmlformats.org/officeDocument/2006/relationships" r:embed="rIdEhelCrest1"/>
+          <a:stretch xmlns:a="http://schemas.openxmlformats.org/drawingml/2006/main">
+            <a:fillRect/>
+          </a:stretch>
+        </p:blipFill>
+        <p:spPr>
+          <a:xfrm xmlns:a="http://schemas.openxmlformats.org/drawingml/2006/main">
+            <a:off x="11506200" y="76200"/>
+            <a:ext cx="457200" cy="457200"/>
+          </a:xfrm>
+          <a:prstGeom xmlns:a="http://schemas.openxmlformats.org/drawingml/2006/main" prst="rect">
+            <a:avLst/>
+          </a:prstGeom>
+        </p:spPr>
+      </p:pic>
+      <p:pic>
+        <p:nvPicPr>
+          <p:cNvPr id="950" name="Ehel Academy crest (title)" descr="Ehel Academy"/>
+          <p:cNvPicPr>
+            <a:picLocks xmlns:a="http://schemas.openxmlformats.org/drawingml/2006/main" noChangeAspect="1"/>
+          </p:cNvPicPr>
+          <p:nvPr/>
+        </p:nvPicPr>
+        <p:blipFill>
+          <a:blip xmlns:a="http://schemas.openxmlformats.org/drawingml/2006/main" xmlns:r="http://schemas.openxmlformats.org/officeDocument/2006/relationships" r:embed="rIdEhelCrest1"/>
+          <a:stretch xmlns:a="http://schemas.openxmlformats.org/drawingml/2006/main">
+            <a:fillRect/>
+          </a:stretch>
+        </p:blipFill>
+        <p:spPr>
+          <a:xfrm xmlns:a="http://schemas.openxmlformats.org/drawingml/2006/main">
+            <a:off x="5676900" y="685800"/>
+            <a:ext cx="838200" cy="838200"/>
+          </a:xfrm>
+          <a:prstGeom xmlns:a="http://schemas.openxmlformats.org/drawingml/2006/main" prst="rect">
+            <a:avLst/>
+          </a:prstGeom>
+        </p:spPr>
+      </p:pic>
     </p:spTree>
     <p:extLst>
       <p:ext uri="{BB962C8B-B14F-4D97-AF65-F5344CB8AC3E}">
@@ -2592,6 +2640,30 @@
           </a:p>
         </p:txBody>
       </p:sp>
+      <p:pic>
+        <p:nvPicPr>
+          <p:cNvPr id="910" name="Ehel Academy crest" descr="Ehel Academy"/>
+          <p:cNvPicPr>
+            <a:picLocks xmlns:a="http://schemas.openxmlformats.org/drawingml/2006/main" noChangeAspect="1"/>
+          </p:cNvPicPr>
+          <p:nvPr/>
+        </p:nvPicPr>
+        <p:blipFill>
+          <a:blip xmlns:a="http://schemas.openxmlformats.org/drawingml/2006/main" xmlns:r="http://schemas.openxmlformats.org/officeDocument/2006/relationships" r:embed="rIdEhelCrest1"/>
+          <a:stretch xmlns:a="http://schemas.openxmlformats.org/drawingml/2006/main">
+            <a:fillRect/>
+          </a:stretch>
+        </p:blipFill>
+        <p:spPr>
+          <a:xfrm xmlns:a="http://schemas.openxmlformats.org/drawingml/2006/main">
+            <a:off x="11506200" y="76200"/>
+            <a:ext cx="457200" cy="457200"/>
+          </a:xfrm>
+          <a:prstGeom xmlns:a="http://schemas.openxmlformats.org/drawingml/2006/main" prst="rect">
+            <a:avLst/>
+          </a:prstGeom>
+        </p:spPr>
+      </p:pic>
     </p:spTree>
     <p:extLst>
       <p:ext uri="{BB962C8B-B14F-4D97-AF65-F5344CB8AC3E}">
@@ -3340,6 +3412,30 @@
           </a:p>
         </p:txBody>
       </p:sp>
+      <p:pic>
+        <p:nvPicPr>
+          <p:cNvPr id="902" name="Ehel Academy crest" descr="Ehel Academy"/>
+          <p:cNvPicPr>
+            <a:picLocks xmlns:a="http://schemas.openxmlformats.org/drawingml/2006/main" noChangeAspect="1"/>
+          </p:cNvPicPr>
+          <p:nvPr/>
+        </p:nvPicPr>
+        <p:blipFill>
+          <a:blip xmlns:a="http://schemas.openxmlformats.org/drawingml/2006/main" xmlns:r="http://schemas.openxmlformats.org/officeDocument/2006/relationships" r:embed="rIdEhelCrest1"/>
+          <a:stretch xmlns:a="http://schemas.openxmlformats.org/drawingml/2006/main">
+            <a:fillRect/>
+          </a:stretch>
+        </p:blipFill>
+        <p:spPr>
+          <a:xfrm xmlns:a="http://schemas.openxmlformats.org/drawingml/2006/main">
+            <a:off x="11506200" y="76200"/>
+            <a:ext cx="457200" cy="457200"/>
+          </a:xfrm>
+          <a:prstGeom xmlns:a="http://schemas.openxmlformats.org/drawingml/2006/main" prst="rect">
+            <a:avLst/>
+          </a:prstGeom>
+        </p:spPr>
+      </p:pic>
     </p:spTree>
     <p:extLst>
       <p:ext uri="{BB962C8B-B14F-4D97-AF65-F5344CB8AC3E}">
@@ -3918,6 +4014,30 @@
           </a:p>
         </p:txBody>
       </p:sp>
+      <p:pic>
+        <p:nvPicPr>
+          <p:cNvPr id="903" name="Ehel Academy crest" descr="Ehel Academy"/>
+          <p:cNvPicPr>
+            <a:picLocks xmlns:a="http://schemas.openxmlformats.org/drawingml/2006/main" noChangeAspect="1"/>
+          </p:cNvPicPr>
+          <p:nvPr/>
+        </p:nvPicPr>
+        <p:blipFill>
+          <a:blip xmlns:a="http://schemas.openxmlformats.org/drawingml/2006/main" xmlns:r="http://schemas.openxmlformats.org/officeDocument/2006/relationships" r:embed="rIdEhelCrest1"/>
+          <a:stretch xmlns:a="http://schemas.openxmlformats.org/drawingml/2006/main">
+            <a:fillRect/>
+          </a:stretch>
+        </p:blipFill>
+        <p:spPr>
+          <a:xfrm xmlns:a="http://schemas.openxmlformats.org/drawingml/2006/main">
+            <a:off x="11506200" y="76200"/>
+            <a:ext cx="457200" cy="457200"/>
+          </a:xfrm>
+          <a:prstGeom xmlns:a="http://schemas.openxmlformats.org/drawingml/2006/main" prst="rect">
+            <a:avLst/>
+          </a:prstGeom>
+        </p:spPr>
+      </p:pic>
     </p:spTree>
     <p:extLst>
       <p:ext uri="{BB962C8B-B14F-4D97-AF65-F5344CB8AC3E}">
@@ -4496,6 +4616,30 @@
           </a:p>
         </p:txBody>
       </p:sp>
+      <p:pic>
+        <p:nvPicPr>
+          <p:cNvPr id="904" name="Ehel Academy crest" descr="Ehel Academy"/>
+          <p:cNvPicPr>
+            <a:picLocks xmlns:a="http://schemas.openxmlformats.org/drawingml/2006/main" noChangeAspect="1"/>
+          </p:cNvPicPr>
+          <p:nvPr/>
+        </p:nvPicPr>
+        <p:blipFill>
+          <a:blip xmlns:a="http://schemas.openxmlformats.org/drawingml/2006/main" xmlns:r="http://schemas.openxmlformats.org/officeDocument/2006/relationships" r:embed="rIdEhelCrest1"/>
+          <a:stretch xmlns:a="http://schemas.openxmlformats.org/drawingml/2006/main">
+            <a:fillRect/>
+          </a:stretch>
+        </p:blipFill>
+        <p:spPr>
+          <a:xfrm xmlns:a="http://schemas.openxmlformats.org/drawingml/2006/main">
+            <a:off x="11506200" y="76200"/>
+            <a:ext cx="457200" cy="457200"/>
+          </a:xfrm>
+          <a:prstGeom xmlns:a="http://schemas.openxmlformats.org/drawingml/2006/main" prst="rect">
+            <a:avLst/>
+          </a:prstGeom>
+        </p:spPr>
+      </p:pic>
     </p:spTree>
     <p:extLst>
       <p:ext uri="{BB962C8B-B14F-4D97-AF65-F5344CB8AC3E}">
@@ -5074,6 +5218,30 @@
           </a:p>
         </p:txBody>
       </p:sp>
+      <p:pic>
+        <p:nvPicPr>
+          <p:cNvPr id="905" name="Ehel Academy crest" descr="Ehel Academy"/>
+          <p:cNvPicPr>
+            <a:picLocks xmlns:a="http://schemas.openxmlformats.org/drawingml/2006/main" noChangeAspect="1"/>
+          </p:cNvPicPr>
+          <p:nvPr/>
+        </p:nvPicPr>
+        <p:blipFill>
+          <a:blip xmlns:a="http://schemas.openxmlformats.org/drawingml/2006/main" xmlns:r="http://schemas.openxmlformats.org/officeDocument/2006/relationships" r:embed="rIdEhelCrest1"/>
+          <a:stretch xmlns:a="http://schemas.openxmlformats.org/drawingml/2006/main">
+            <a:fillRect/>
+          </a:stretch>
+        </p:blipFill>
+        <p:spPr>
+          <a:xfrm xmlns:a="http://schemas.openxmlformats.org/drawingml/2006/main">
+            <a:off x="11506200" y="76200"/>
+            <a:ext cx="457200" cy="457200"/>
+          </a:xfrm>
+          <a:prstGeom xmlns:a="http://schemas.openxmlformats.org/drawingml/2006/main" prst="rect">
+            <a:avLst/>
+          </a:prstGeom>
+        </p:spPr>
+      </p:pic>
     </p:spTree>
     <p:extLst>
       <p:ext uri="{BB962C8B-B14F-4D97-AF65-F5344CB8AC3E}">
@@ -5652,6 +5820,30 @@
           </a:p>
         </p:txBody>
       </p:sp>
+      <p:pic>
+        <p:nvPicPr>
+          <p:cNvPr id="906" name="Ehel Academy crest" descr="Ehel Academy"/>
+          <p:cNvPicPr>
+            <a:picLocks xmlns:a="http://schemas.openxmlformats.org/drawingml/2006/main" noChangeAspect="1"/>
+          </p:cNvPicPr>
+          <p:nvPr/>
+        </p:nvPicPr>
+        <p:blipFill>
+          <a:blip xmlns:a="http://schemas.openxmlformats.org/drawingml/2006/main" xmlns:r="http://schemas.openxmlformats.org/officeDocument/2006/relationships" r:embed="rIdEhelCrest1"/>
+          <a:stretch xmlns:a="http://schemas.openxmlformats.org/drawingml/2006/main">
+            <a:fillRect/>
+          </a:stretch>
+        </p:blipFill>
+        <p:spPr>
+          <a:xfrm xmlns:a="http://schemas.openxmlformats.org/drawingml/2006/main">
+            <a:off x="11506200" y="76200"/>
+            <a:ext cx="457200" cy="457200"/>
+          </a:xfrm>
+          <a:prstGeom xmlns:a="http://schemas.openxmlformats.org/drawingml/2006/main" prst="rect">
+            <a:avLst/>
+          </a:prstGeom>
+        </p:spPr>
+      </p:pic>
     </p:spTree>
     <p:extLst>
       <p:ext uri="{BB962C8B-B14F-4D97-AF65-F5344CB8AC3E}">
@@ -6230,6 +6422,30 @@
           </a:p>
         </p:txBody>
       </p:sp>
+      <p:pic>
+        <p:nvPicPr>
+          <p:cNvPr id="907" name="Ehel Academy crest" descr="Ehel Academy"/>
+          <p:cNvPicPr>
+            <a:picLocks xmlns:a="http://schemas.openxmlformats.org/drawingml/2006/main" noChangeAspect="1"/>
+          </p:cNvPicPr>
+          <p:nvPr/>
+        </p:nvPicPr>
+        <p:blipFill>
+          <a:blip xmlns:a="http://schemas.openxmlformats.org/drawingml/2006/main" xmlns:r="http://schemas.openxmlformats.org/officeDocument/2006/relationships" r:embed="rIdEhelCrest1"/>
+          <a:stretch xmlns:a="http://schemas.openxmlformats.org/drawingml/2006/main">
+            <a:fillRect/>
+          </a:stretch>
+        </p:blipFill>
+        <p:spPr>
+          <a:xfrm xmlns:a="http://schemas.openxmlformats.org/drawingml/2006/main">
+            <a:off x="11506200" y="76200"/>
+            <a:ext cx="457200" cy="457200"/>
+          </a:xfrm>
+          <a:prstGeom xmlns:a="http://schemas.openxmlformats.org/drawingml/2006/main" prst="rect">
+            <a:avLst/>
+          </a:prstGeom>
+        </p:spPr>
+      </p:pic>
     </p:spTree>
     <p:extLst>
       <p:ext uri="{BB962C8B-B14F-4D97-AF65-F5344CB8AC3E}">
@@ -6897,6 +7113,30 @@
           </a:p>
         </p:txBody>
       </p:sp>
+      <p:pic>
+        <p:nvPicPr>
+          <p:cNvPr id="908" name="Ehel Academy crest" descr="Ehel Academy"/>
+          <p:cNvPicPr>
+            <a:picLocks xmlns:a="http://schemas.openxmlformats.org/drawingml/2006/main" noChangeAspect="1"/>
+          </p:cNvPicPr>
+          <p:nvPr/>
+        </p:nvPicPr>
+        <p:blipFill>
+          <a:blip xmlns:a="http://schemas.openxmlformats.org/drawingml/2006/main" xmlns:r="http://schemas.openxmlformats.org/officeDocument/2006/relationships" r:embed="rIdEhelCrest1"/>
+          <a:stretch xmlns:a="http://schemas.openxmlformats.org/drawingml/2006/main">
+            <a:fillRect/>
+          </a:stretch>
+        </p:blipFill>
+        <p:spPr>
+          <a:xfrm xmlns:a="http://schemas.openxmlformats.org/drawingml/2006/main">
+            <a:off x="11506200" y="76200"/>
+            <a:ext cx="457200" cy="457200"/>
+          </a:xfrm>
+          <a:prstGeom xmlns:a="http://schemas.openxmlformats.org/drawingml/2006/main" prst="rect">
+            <a:avLst/>
+          </a:prstGeom>
+        </p:spPr>
+      </p:pic>
     </p:spTree>
     <p:extLst>
       <p:ext uri="{BB962C8B-B14F-4D97-AF65-F5344CB8AC3E}">
@@ -7564,6 +7804,30 @@
           </a:p>
         </p:txBody>
       </p:sp>
+      <p:pic>
+        <p:nvPicPr>
+          <p:cNvPr id="909" name="Ehel Academy crest" descr="Ehel Academy"/>
+          <p:cNvPicPr>
+            <a:picLocks xmlns:a="http://schemas.openxmlformats.org/drawingml/2006/main" noChangeAspect="1"/>
+          </p:cNvPicPr>
+          <p:nvPr/>
+        </p:nvPicPr>
+        <p:blipFill>
+          <a:blip xmlns:a="http://schemas.openxmlformats.org/drawingml/2006/main" xmlns:r="http://schemas.openxmlformats.org/officeDocument/2006/relationships" r:embed="rIdEhelCrest1"/>
+          <a:stretch xmlns:a="http://schemas.openxmlformats.org/drawingml/2006/main">
+            <a:fillRect/>
+          </a:stretch>
+        </p:blipFill>
+        <p:spPr>
+          <a:xfrm xmlns:a="http://schemas.openxmlformats.org/drawingml/2006/main">
+            <a:off x="11506200" y="76200"/>
+            <a:ext cx="457200" cy="457200"/>
+          </a:xfrm>
+          <a:prstGeom xmlns:a="http://schemas.openxmlformats.org/drawingml/2006/main" prst="rect">
+            <a:avLst/>
+          </a:prstGeom>
+        </p:spPr>
+      </p:pic>
     </p:spTree>
     <p:extLst>
       <p:ext uri="{BB962C8B-B14F-4D97-AF65-F5344CB8AC3E}">
